--- a/src/main/pptx-converter/output/Nespresso.pptx
+++ b/src/main/pptx-converter/output/Nespresso.pptx
@@ -3403,96 +3403,33 @@
           </a:p>
         </p:txBody>
       </p:sp>
-      <p:sp>
-        <p:nvSpPr>
-          <p:cNvPr id="9" name="Rounded Rectangle 8"/>
-          <p:cNvSpPr/>
-          <p:nvPr/>
-        </p:nvSpPr>
-        <p:spPr>
-          <a:xfrm>
-            <a:off x="8366760" y="1143000"/>
-            <a:ext cx="2880360" cy="4434840"/>
-          </a:xfrm>
-          <a:prstGeom prst="roundRect">
-            <a:avLst>
-              <a:gd name="adj" fmla="val 8000"/>
-            </a:avLst>
-          </a:prstGeom>
-          <a:solidFill>
-            <a:srgbClr val="1E3450"/>
-          </a:solidFill>
-          <a:ln>
-            <a:solidFill>
-              <a:srgbClr val="34516F"/>
-            </a:solidFill>
-          </a:ln>
-        </p:spPr>
-        <p:style>
-          <a:lnRef idx="1">
-            <a:schemeClr val="accent1"/>
-          </a:lnRef>
-          <a:fillRef idx="3">
-            <a:schemeClr val="accent1"/>
-          </a:fillRef>
-          <a:effectRef idx="2">
-            <a:schemeClr val="accent1"/>
-          </a:effectRef>
-          <a:fontRef idx="minor">
-            <a:schemeClr val="lt1"/>
-          </a:fontRef>
-        </p:style>
-        <p:txBody>
-          <a:bodyPr rtlCol="0" anchor="ctr"/>
-          <a:lstStyle/>
-          <a:p>
-            <a:pPr algn="ctr"/>
-          </a:p>
-        </p:txBody>
-      </p:sp>
+      <p:pic>
+        <p:nvPicPr>
+          <p:cNvPr id="9" name="Picture 8" descr="machine_root.jpg"/>
+          <p:cNvPicPr>
+            <a:picLocks noChangeAspect="1"/>
+          </p:cNvPicPr>
+          <p:nvPr/>
+        </p:nvPicPr>
+        <p:blipFill>
+          <a:blip r:embed="rId2"/>
+          <a:stretch>
+            <a:fillRect/>
+          </a:stretch>
+        </p:blipFill>
+        <p:spPr>
+          <a:xfrm>
+            <a:off x="8138160" y="2346960"/>
+            <a:ext cx="3383280" cy="2255520"/>
+          </a:xfrm>
+          <a:prstGeom prst="rect">
+            <a:avLst/>
+          </a:prstGeom>
+        </p:spPr>
+      </p:pic>
       <p:sp>
         <p:nvSpPr>
           <p:cNvPr id="10" name="TextBox 9"/>
-          <p:cNvSpPr txBox="1"/>
-          <p:nvPr/>
-        </p:nvSpPr>
-        <p:spPr>
-          <a:xfrm>
-            <a:off x="8732520" y="2697480"/>
-            <a:ext cx="2148840" cy="914400"/>
-          </a:xfrm>
-          <a:prstGeom prst="rect">
-            <a:avLst/>
-          </a:prstGeom>
-          <a:noFill/>
-        </p:spPr>
-        <p:txBody>
-          <a:bodyPr wrap="square" lIns="27432" rIns="27432" tIns="27432" bIns="27432" anchor="ctr">
-            <a:spAutoFit/>
-          </a:bodyPr>
-          <a:lstStyle/>
-          <a:p>
-            <a:pPr algn="ctr">
-              <a:spcAft>
-                <a:spcPts val="0"/>
-              </a:spcAft>
-            </a:pPr>
-            <a:r>
-              <a:rPr sz="2000" b="1">
-                <a:solidFill>
-                  <a:srgbClr val="7B92AB"/>
-                </a:solidFill>
-                <a:latin typeface="Aptos"/>
-              </a:rPr>
-              <a:t>PRODUCT
-IMAGE</a:t>
-            </a:r>
-          </a:p>
-        </p:txBody>
-      </p:sp>
-      <p:sp>
-        <p:nvSpPr>
-          <p:cNvPr id="11" name="TextBox 10"/>
           <p:cNvSpPr txBox="1"/>
           <p:nvPr/>
         </p:nvSpPr>
@@ -3531,7 +3468,7 @@
       </p:sp>
       <p:sp>
         <p:nvSpPr>
-          <p:cNvPr id="12" name="TextBox 11"/>
+          <p:cNvPr id="11" name="TextBox 10"/>
           <p:cNvSpPr txBox="1"/>
           <p:nvPr/>
         </p:nvSpPr>
@@ -8149,53 +8086,30 @@
           </a:p>
         </p:txBody>
       </p:sp>
-      <p:sp>
-        <p:nvSpPr>
-          <p:cNvPr id="14" name="Rounded Rectangle 13"/>
-          <p:cNvSpPr/>
-          <p:nvPr/>
-        </p:nvSpPr>
-        <p:spPr>
-          <a:xfrm>
-            <a:off x="7772400" y="2331720"/>
-            <a:ext cx="1146047" cy="1371599"/>
-          </a:xfrm>
-          <a:prstGeom prst="roundRect">
-            <a:avLst>
-              <a:gd name="adj" fmla="val 8000"/>
-            </a:avLst>
-          </a:prstGeom>
-          <a:solidFill>
-            <a:srgbClr val="EEF2F7"/>
-          </a:solidFill>
-          <a:ln>
-            <a:solidFill>
-              <a:srgbClr val="D9E2EC"/>
-            </a:solidFill>
-          </a:ln>
-        </p:spPr>
-        <p:style>
-          <a:lnRef idx="1">
-            <a:schemeClr val="accent1"/>
-          </a:lnRef>
-          <a:fillRef idx="3">
-            <a:schemeClr val="accent1"/>
-          </a:fillRef>
-          <a:effectRef idx="2">
-            <a:schemeClr val="accent1"/>
-          </a:effectRef>
-          <a:fontRef idx="minor">
-            <a:schemeClr val="lt1"/>
-          </a:fontRef>
-        </p:style>
-        <p:txBody>
-          <a:bodyPr rtlCol="0" anchor="ctr"/>
-          <a:lstStyle/>
-          <a:p>
-            <a:pPr algn="ctr"/>
-          </a:p>
-        </p:txBody>
-      </p:sp>
+      <p:pic>
+        <p:nvPicPr>
+          <p:cNvPr id="14" name="Picture 13" descr="action_remove_external.jpg"/>
+          <p:cNvPicPr>
+            <a:picLocks noChangeAspect="1"/>
+          </p:cNvPicPr>
+          <p:nvPr/>
+        </p:nvPicPr>
+        <p:blipFill>
+          <a:blip r:embed="rId2"/>
+          <a:stretch>
+            <a:fillRect/>
+          </a:stretch>
+        </p:blipFill>
+        <p:spPr>
+          <a:xfrm>
+            <a:off x="7772400" y="2635504"/>
+            <a:ext cx="1146047" cy="764032"/>
+          </a:xfrm>
+          <a:prstGeom prst="rect">
+            <a:avLst/>
+          </a:prstGeom>
+        </p:spPr>
+      </p:pic>
       <p:sp>
         <p:nvSpPr>
           <p:cNvPr id="15" name="TextBox 14"/>
@@ -8235,53 +8149,30 @@
           </a:p>
         </p:txBody>
       </p:sp>
-      <p:sp>
-        <p:nvSpPr>
-          <p:cNvPr id="16" name="Rounded Rectangle 15"/>
-          <p:cNvSpPr/>
-          <p:nvPr/>
-        </p:nvSpPr>
-        <p:spPr>
-          <a:xfrm>
-            <a:off x="9028176" y="2331720"/>
-            <a:ext cx="1146047" cy="1371599"/>
-          </a:xfrm>
-          <a:prstGeom prst="roundRect">
-            <a:avLst>
-              <a:gd name="adj" fmla="val 8000"/>
-            </a:avLst>
-          </a:prstGeom>
-          <a:solidFill>
-            <a:srgbClr val="EEF2F7"/>
-          </a:solidFill>
-          <a:ln>
-            <a:solidFill>
-              <a:srgbClr val="D9E2EC"/>
-            </a:solidFill>
-          </a:ln>
-        </p:spPr>
-        <p:style>
-          <a:lnRef idx="1">
-            <a:schemeClr val="accent1"/>
-          </a:lnRef>
-          <a:fillRef idx="3">
-            <a:schemeClr val="accent1"/>
-          </a:fillRef>
-          <a:effectRef idx="2">
-            <a:schemeClr val="accent1"/>
-          </a:effectRef>
-          <a:fontRef idx="minor">
-            <a:schemeClr val="lt1"/>
-          </a:fontRef>
-        </p:style>
-        <p:txBody>
-          <a:bodyPr rtlCol="0" anchor="ctr"/>
-          <a:lstStyle/>
-          <a:p>
-            <a:pPr algn="ctr"/>
-          </a:p>
-        </p:txBody>
-      </p:sp>
+      <p:pic>
+        <p:nvPicPr>
+          <p:cNvPr id="16" name="Picture 15" descr="water_tank.jpg"/>
+          <p:cNvPicPr>
+            <a:picLocks noChangeAspect="1"/>
+          </p:cNvPicPr>
+          <p:nvPr/>
+        </p:nvPicPr>
+        <p:blipFill>
+          <a:blip r:embed="rId3"/>
+          <a:stretch>
+            <a:fillRect/>
+          </a:stretch>
+        </p:blipFill>
+        <p:spPr>
+          <a:xfrm>
+            <a:off x="9028176" y="2635504"/>
+            <a:ext cx="1146047" cy="764032"/>
+          </a:xfrm>
+          <a:prstGeom prst="rect">
+            <a:avLst/>
+          </a:prstGeom>
+        </p:spPr>
+      </p:pic>
       <p:sp>
         <p:nvSpPr>
           <p:cNvPr id="17" name="TextBox 16"/>
@@ -8321,53 +8212,30 @@
           </a:p>
         </p:txBody>
       </p:sp>
-      <p:sp>
-        <p:nvSpPr>
-          <p:cNvPr id="18" name="Rounded Rectangle 17"/>
-          <p:cNvSpPr/>
-          <p:nvPr/>
-        </p:nvSpPr>
-        <p:spPr>
-          <a:xfrm>
-            <a:off x="10283952" y="2331720"/>
-            <a:ext cx="1146047" cy="1371599"/>
-          </a:xfrm>
-          <a:prstGeom prst="roundRect">
-            <a:avLst>
-              <a:gd name="adj" fmla="val 8000"/>
-            </a:avLst>
-          </a:prstGeom>
-          <a:solidFill>
-            <a:srgbClr val="EEF2F7"/>
-          </a:solidFill>
-          <a:ln>
-            <a:solidFill>
-              <a:srgbClr val="D9E2EC"/>
-            </a:solidFill>
-          </a:ln>
-        </p:spPr>
-        <p:style>
-          <a:lnRef idx="1">
-            <a:schemeClr val="accent1"/>
-          </a:lnRef>
-          <a:fillRef idx="3">
-            <a:schemeClr val="accent1"/>
-          </a:fillRef>
-          <a:effectRef idx="2">
-            <a:schemeClr val="accent1"/>
-          </a:effectRef>
-          <a:fontRef idx="minor">
-            <a:schemeClr val="lt1"/>
-          </a:fontRef>
-        </p:style>
-        <p:txBody>
-          <a:bodyPr rtlCol="0" anchor="ctr"/>
-          <a:lstStyle/>
-          <a:p>
-            <a:pPr algn="ctr"/>
-          </a:p>
-        </p:txBody>
-      </p:sp>
+      <p:pic>
+        <p:nvPicPr>
+          <p:cNvPr id="18" name="Picture 17" descr="drip_tray.jpg"/>
+          <p:cNvPicPr>
+            <a:picLocks noChangeAspect="1"/>
+          </p:cNvPicPr>
+          <p:nvPr/>
+        </p:nvPicPr>
+        <p:blipFill>
+          <a:blip r:embed="rId4"/>
+          <a:stretch>
+            <a:fillRect/>
+          </a:stretch>
+        </p:blipFill>
+        <p:spPr>
+          <a:xfrm>
+            <a:off x="10283952" y="2635504"/>
+            <a:ext cx="1146047" cy="764032"/>
+          </a:xfrm>
+          <a:prstGeom prst="rect">
+            <a:avLst/>
+          </a:prstGeom>
+        </p:spPr>
+      </p:pic>
       <p:sp>
         <p:nvSpPr>
           <p:cNvPr id="19" name="TextBox 18"/>
@@ -9255,53 +9123,30 @@
           </a:p>
         </p:txBody>
       </p:sp>
-      <p:sp>
-        <p:nvSpPr>
-          <p:cNvPr id="14" name="Rounded Rectangle 13"/>
-          <p:cNvSpPr/>
-          <p:nvPr/>
-        </p:nvSpPr>
-        <p:spPr>
-          <a:xfrm>
-            <a:off x="7772400" y="2331720"/>
-            <a:ext cx="1146047" cy="1371599"/>
-          </a:xfrm>
-          <a:prstGeom prst="roundRect">
-            <a:avLst>
-              <a:gd name="adj" fmla="val 8000"/>
-            </a:avLst>
-          </a:prstGeom>
-          <a:solidFill>
-            <a:srgbClr val="EEF2F7"/>
-          </a:solidFill>
-          <a:ln>
-            <a:solidFill>
-              <a:srgbClr val="D9E2EC"/>
-            </a:solidFill>
-          </a:ln>
-        </p:spPr>
-        <p:style>
-          <a:lnRef idx="1">
-            <a:schemeClr val="accent1"/>
-          </a:lnRef>
-          <a:fillRef idx="3">
-            <a:schemeClr val="accent1"/>
-          </a:fillRef>
-          <a:effectRef idx="2">
-            <a:schemeClr val="accent1"/>
-          </a:effectRef>
-          <a:fontRef idx="minor">
-            <a:schemeClr val="lt1"/>
-          </a:fontRef>
-        </p:style>
-        <p:txBody>
-          <a:bodyPr rtlCol="0" anchor="ctr"/>
-          <a:lstStyle/>
-          <a:p>
-            <a:pPr algn="ctr"/>
-          </a:p>
-        </p:txBody>
-      </p:sp>
+      <p:pic>
+        <p:nvPicPr>
+          <p:cNvPr id="14" name="Picture 13" descr="action_unscrew_casing.jpg"/>
+          <p:cNvPicPr>
+            <a:picLocks noChangeAspect="1"/>
+          </p:cNvPicPr>
+          <p:nvPr/>
+        </p:nvPicPr>
+        <p:blipFill>
+          <a:blip r:embed="rId2"/>
+          <a:stretch>
+            <a:fillRect/>
+          </a:stretch>
+        </p:blipFill>
+        <p:spPr>
+          <a:xfrm>
+            <a:off x="7772400" y="2635504"/>
+            <a:ext cx="1146047" cy="764032"/>
+          </a:xfrm>
+          <a:prstGeom prst="rect">
+            <a:avLst/>
+          </a:prstGeom>
+        </p:spPr>
+      </p:pic>
       <p:sp>
         <p:nvSpPr>
           <p:cNvPr id="15" name="TextBox 14"/>
@@ -9341,53 +9186,30 @@
           </a:p>
         </p:txBody>
       </p:sp>
-      <p:sp>
-        <p:nvSpPr>
-          <p:cNvPr id="16" name="Rounded Rectangle 15"/>
-          <p:cNvSpPr/>
-          <p:nvPr/>
-        </p:nvSpPr>
-        <p:spPr>
-          <a:xfrm>
-            <a:off x="9028176" y="2331720"/>
-            <a:ext cx="1146047" cy="1371599"/>
-          </a:xfrm>
-          <a:prstGeom prst="roundRect">
-            <a:avLst>
-              <a:gd name="adj" fmla="val 8000"/>
-            </a:avLst>
-          </a:prstGeom>
-          <a:solidFill>
-            <a:srgbClr val="EEF2F7"/>
-          </a:solidFill>
-          <a:ln>
-            <a:solidFill>
-              <a:srgbClr val="D9E2EC"/>
-            </a:solidFill>
-          </a:ln>
-        </p:spPr>
-        <p:style>
-          <a:lnRef idx="1">
-            <a:schemeClr val="accent1"/>
-          </a:lnRef>
-          <a:fillRef idx="3">
-            <a:schemeClr val="accent1"/>
-          </a:fillRef>
-          <a:effectRef idx="2">
-            <a:schemeClr val="accent1"/>
-          </a:effectRef>
-          <a:fontRef idx="minor">
-            <a:schemeClr val="lt1"/>
-          </a:fontRef>
-        </p:style>
-        <p:txBody>
-          <a:bodyPr rtlCol="0" anchor="ctr"/>
-          <a:lstStyle/>
-          <a:p>
-            <a:pPr algn="ctr"/>
-          </a:p>
-        </p:txBody>
-      </p:sp>
+      <p:pic>
+        <p:nvPicPr>
+          <p:cNvPr id="16" name="Picture 15" descr="oval_screws.jpg"/>
+          <p:cNvPicPr>
+            <a:picLocks noChangeAspect="1"/>
+          </p:cNvPicPr>
+          <p:nvPr/>
+        </p:nvPicPr>
+        <p:blipFill>
+          <a:blip r:embed="rId3"/>
+          <a:stretch>
+            <a:fillRect/>
+          </a:stretch>
+        </p:blipFill>
+        <p:spPr>
+          <a:xfrm>
+            <a:off x="9028176" y="2635504"/>
+            <a:ext cx="1146047" cy="764032"/>
+          </a:xfrm>
+          <a:prstGeom prst="rect">
+            <a:avLst/>
+          </a:prstGeom>
+        </p:spPr>
+      </p:pic>
       <p:sp>
         <p:nvSpPr>
           <p:cNvPr id="17" name="TextBox 16"/>
@@ -9427,53 +9249,30 @@
           </a:p>
         </p:txBody>
       </p:sp>
-      <p:sp>
-        <p:nvSpPr>
-          <p:cNvPr id="18" name="Rounded Rectangle 17"/>
-          <p:cNvSpPr/>
-          <p:nvPr/>
-        </p:nvSpPr>
-        <p:spPr>
-          <a:xfrm>
-            <a:off x="10283952" y="2331720"/>
-            <a:ext cx="1146047" cy="1371599"/>
-          </a:xfrm>
-          <a:prstGeom prst="roundRect">
-            <a:avLst>
-              <a:gd name="adj" fmla="val 8000"/>
-            </a:avLst>
-          </a:prstGeom>
-          <a:solidFill>
-            <a:srgbClr val="EEF2F7"/>
-          </a:solidFill>
-          <a:ln>
-            <a:solidFill>
-              <a:srgbClr val="D9E2EC"/>
-            </a:solidFill>
-          </a:ln>
-        </p:spPr>
-        <p:style>
-          <a:lnRef idx="1">
-            <a:schemeClr val="accent1"/>
-          </a:lnRef>
-          <a:fillRef idx="3">
-            <a:schemeClr val="accent1"/>
-          </a:fillRef>
-          <a:effectRef idx="2">
-            <a:schemeClr val="accent1"/>
-          </a:effectRef>
-          <a:fontRef idx="minor">
-            <a:schemeClr val="lt1"/>
-          </a:fontRef>
-        </p:style>
-        <p:txBody>
-          <a:bodyPr rtlCol="0" anchor="ctr"/>
-          <a:lstStyle/>
-          <a:p>
-            <a:pPr algn="ctr"/>
-          </a:p>
-        </p:txBody>
-      </p:sp>
+      <p:pic>
+        <p:nvPicPr>
+          <p:cNvPr id="18" name="Picture 17" descr="action_unscrew_casing.jpg"/>
+          <p:cNvPicPr>
+            <a:picLocks noChangeAspect="1"/>
+          </p:cNvPicPr>
+          <p:nvPr/>
+        </p:nvPicPr>
+        <p:blipFill>
+          <a:blip r:embed="rId2"/>
+          <a:stretch>
+            <a:fillRect/>
+          </a:stretch>
+        </p:blipFill>
+        <p:spPr>
+          <a:xfrm>
+            <a:off x="10283952" y="2635504"/>
+            <a:ext cx="1146047" cy="764032"/>
+          </a:xfrm>
+          <a:prstGeom prst="rect">
+            <a:avLst/>
+          </a:prstGeom>
+        </p:spPr>
+      </p:pic>
       <p:sp>
         <p:nvSpPr>
           <p:cNvPr id="19" name="TextBox 18"/>
@@ -10359,53 +10158,30 @@
           </a:p>
         </p:txBody>
       </p:sp>
-      <p:sp>
-        <p:nvSpPr>
-          <p:cNvPr id="14" name="Rounded Rectangle 13"/>
-          <p:cNvSpPr/>
-          <p:nvPr/>
-        </p:nvSpPr>
-        <p:spPr>
-          <a:xfrm>
-            <a:off x="7772400" y="2331720"/>
-            <a:ext cx="1146047" cy="1371599"/>
-          </a:xfrm>
-          <a:prstGeom prst="roundRect">
-            <a:avLst>
-              <a:gd name="adj" fmla="val 8000"/>
-            </a:avLst>
-          </a:prstGeom>
-          <a:solidFill>
-            <a:srgbClr val="EEF2F7"/>
-          </a:solidFill>
-          <a:ln>
-            <a:solidFill>
-              <a:srgbClr val="D9E2EC"/>
-            </a:solidFill>
-          </a:ln>
-        </p:spPr>
-        <p:style>
-          <a:lnRef idx="1">
-            <a:schemeClr val="accent1"/>
-          </a:lnRef>
-          <a:fillRef idx="3">
-            <a:schemeClr val="accent1"/>
-          </a:fillRef>
-          <a:effectRef idx="2">
-            <a:schemeClr val="accent1"/>
-          </a:effectRef>
-          <a:fontRef idx="minor">
-            <a:schemeClr val="lt1"/>
-          </a:fontRef>
-        </p:style>
-        <p:txBody>
-          <a:bodyPr rtlCol="0" anchor="ctr"/>
-          <a:lstStyle/>
-          <a:p>
-            <a:pPr algn="ctr"/>
-          </a:p>
-        </p:txBody>
-      </p:sp>
+      <p:pic>
+        <p:nvPicPr>
+          <p:cNvPr id="14" name="Picture 13" descr="diamond_release_clips.jpg"/>
+          <p:cNvPicPr>
+            <a:picLocks noChangeAspect="1"/>
+          </p:cNvPicPr>
+          <p:nvPr/>
+        </p:nvPicPr>
+        <p:blipFill>
+          <a:blip r:embed="rId2"/>
+          <a:stretch>
+            <a:fillRect/>
+          </a:stretch>
+        </p:blipFill>
+        <p:spPr>
+          <a:xfrm>
+            <a:off x="7772400" y="2635504"/>
+            <a:ext cx="1146047" cy="764032"/>
+          </a:xfrm>
+          <a:prstGeom prst="rect">
+            <a:avLst/>
+          </a:prstGeom>
+        </p:spPr>
+      </p:pic>
       <p:sp>
         <p:nvSpPr>
           <p:cNvPr id="15" name="TextBox 14"/>
@@ -10445,53 +10221,30 @@
           </a:p>
         </p:txBody>
       </p:sp>
-      <p:sp>
-        <p:nvSpPr>
-          <p:cNvPr id="16" name="Rounded Rectangle 15"/>
-          <p:cNvSpPr/>
-          <p:nvPr/>
-        </p:nvSpPr>
-        <p:spPr>
-          <a:xfrm>
-            <a:off x="9028176" y="2331720"/>
-            <a:ext cx="1146047" cy="1371599"/>
-          </a:xfrm>
-          <a:prstGeom prst="roundRect">
-            <a:avLst>
-              <a:gd name="adj" fmla="val 8000"/>
-            </a:avLst>
-          </a:prstGeom>
-          <a:solidFill>
-            <a:srgbClr val="EEF2F7"/>
-          </a:solidFill>
-          <a:ln>
-            <a:solidFill>
-              <a:srgbClr val="D9E2EC"/>
-            </a:solidFill>
-          </a:ln>
-        </p:spPr>
-        <p:style>
-          <a:lnRef idx="1">
-            <a:schemeClr val="accent1"/>
-          </a:lnRef>
-          <a:fillRef idx="3">
-            <a:schemeClr val="accent1"/>
-          </a:fillRef>
-          <a:effectRef idx="2">
-            <a:schemeClr val="accent1"/>
-          </a:effectRef>
-          <a:fontRef idx="minor">
-            <a:schemeClr val="lt1"/>
-          </a:fontRef>
-        </p:style>
-        <p:txBody>
-          <a:bodyPr rtlCol="0" anchor="ctr"/>
-          <a:lstStyle/>
-          <a:p>
-            <a:pPr algn="ctr"/>
-          </a:p>
-        </p:txBody>
-      </p:sp>
+      <p:pic>
+        <p:nvPicPr>
+          <p:cNvPr id="16" name="Picture 15" descr="side_panel_left.jpg"/>
+          <p:cNvPicPr>
+            <a:picLocks noChangeAspect="1"/>
+          </p:cNvPicPr>
+          <p:nvPr/>
+        </p:nvPicPr>
+        <p:blipFill>
+          <a:blip r:embed="rId3"/>
+          <a:stretch>
+            <a:fillRect/>
+          </a:stretch>
+        </p:blipFill>
+        <p:spPr>
+          <a:xfrm>
+            <a:off x="9028176" y="2635504"/>
+            <a:ext cx="1146047" cy="764032"/>
+          </a:xfrm>
+          <a:prstGeom prst="rect">
+            <a:avLst/>
+          </a:prstGeom>
+        </p:spPr>
+      </p:pic>
       <p:sp>
         <p:nvSpPr>
           <p:cNvPr id="17" name="TextBox 16"/>
@@ -10531,53 +10284,30 @@
           </a:p>
         </p:txBody>
       </p:sp>
-      <p:sp>
-        <p:nvSpPr>
-          <p:cNvPr id="18" name="Rounded Rectangle 17"/>
-          <p:cNvSpPr/>
-          <p:nvPr/>
-        </p:nvSpPr>
-        <p:spPr>
-          <a:xfrm>
-            <a:off x="10283952" y="2331720"/>
-            <a:ext cx="1146047" cy="1371599"/>
-          </a:xfrm>
-          <a:prstGeom prst="roundRect">
-            <a:avLst>
-              <a:gd name="adj" fmla="val 8000"/>
-            </a:avLst>
-          </a:prstGeom>
-          <a:solidFill>
-            <a:srgbClr val="EEF2F7"/>
-          </a:solidFill>
-          <a:ln>
-            <a:solidFill>
-              <a:srgbClr val="D9E2EC"/>
-            </a:solidFill>
-          </a:ln>
-        </p:spPr>
-        <p:style>
-          <a:lnRef idx="1">
-            <a:schemeClr val="accent1"/>
-          </a:lnRef>
-          <a:fillRef idx="3">
-            <a:schemeClr val="accent1"/>
-          </a:fillRef>
-          <a:effectRef idx="2">
-            <a:schemeClr val="accent1"/>
-          </a:effectRef>
-          <a:fontRef idx="minor">
-            <a:schemeClr val="lt1"/>
-          </a:fontRef>
-        </p:style>
-        <p:txBody>
-          <a:bodyPr rtlCol="0" anchor="ctr"/>
-          <a:lstStyle/>
-          <a:p>
-            <a:pPr algn="ctr"/>
-          </a:p>
-        </p:txBody>
-      </p:sp>
+      <p:pic>
+        <p:nvPicPr>
+          <p:cNvPr id="18" name="Picture 17" descr="side_panel_right.jpg"/>
+          <p:cNvPicPr>
+            <a:picLocks noChangeAspect="1"/>
+          </p:cNvPicPr>
+          <p:nvPr/>
+        </p:nvPicPr>
+        <p:blipFill>
+          <a:blip r:embed="rId4"/>
+          <a:stretch>
+            <a:fillRect/>
+          </a:stretch>
+        </p:blipFill>
+        <p:spPr>
+          <a:xfrm>
+            <a:off x="10283952" y="2635504"/>
+            <a:ext cx="1146047" cy="764032"/>
+          </a:xfrm>
+          <a:prstGeom prst="rect">
+            <a:avLst/>
+          </a:prstGeom>
+        </p:spPr>
+      </p:pic>
       <p:sp>
         <p:nvSpPr>
           <p:cNvPr id="19" name="TextBox 18"/>
@@ -11464,53 +11194,30 @@
           </a:p>
         </p:txBody>
       </p:sp>
-      <p:sp>
-        <p:nvSpPr>
-          <p:cNvPr id="14" name="Rounded Rectangle 13"/>
-          <p:cNvSpPr/>
-          <p:nvPr/>
-        </p:nvSpPr>
-        <p:spPr>
-          <a:xfrm>
-            <a:off x="7772400" y="2331720"/>
-            <a:ext cx="1146047" cy="1371599"/>
-          </a:xfrm>
-          <a:prstGeom prst="roundRect">
-            <a:avLst>
-              <a:gd name="adj" fmla="val 8000"/>
-            </a:avLst>
-          </a:prstGeom>
-          <a:solidFill>
-            <a:srgbClr val="EEF2F7"/>
-          </a:solidFill>
-          <a:ln>
-            <a:solidFill>
-              <a:srgbClr val="D9E2EC"/>
-            </a:solidFill>
-          </a:ln>
-        </p:spPr>
-        <p:style>
-          <a:lnRef idx="1">
-            <a:schemeClr val="accent1"/>
-          </a:lnRef>
-          <a:fillRef idx="3">
-            <a:schemeClr val="accent1"/>
-          </a:fillRef>
-          <a:effectRef idx="2">
-            <a:schemeClr val="accent1"/>
-          </a:effectRef>
-          <a:fontRef idx="minor">
-            <a:schemeClr val="lt1"/>
-          </a:fontRef>
-        </p:style>
-        <p:txBody>
-          <a:bodyPr rtlCol="0" anchor="ctr"/>
-          <a:lstStyle/>
-          <a:p>
-            <a:pPr algn="ctr"/>
-          </a:p>
-        </p:txBody>
-      </p:sp>
+      <p:pic>
+        <p:nvPicPr>
+          <p:cNvPr id="14" name="Picture 13" descr="action_disconnect_brewing.jpg"/>
+          <p:cNvPicPr>
+            <a:picLocks noChangeAspect="1"/>
+          </p:cNvPicPr>
+          <p:nvPr/>
+        </p:nvPicPr>
+        <p:blipFill>
+          <a:blip r:embed="rId2"/>
+          <a:stretch>
+            <a:fillRect/>
+          </a:stretch>
+        </p:blipFill>
+        <p:spPr>
+          <a:xfrm>
+            <a:off x="7772400" y="2635504"/>
+            <a:ext cx="1146047" cy="764032"/>
+          </a:xfrm>
+          <a:prstGeom prst="rect">
+            <a:avLst/>
+          </a:prstGeom>
+        </p:spPr>
+      </p:pic>
       <p:sp>
         <p:nvSpPr>
           <p:cNvPr id="15" name="TextBox 14"/>
@@ -11550,53 +11257,30 @@
           </a:p>
         </p:txBody>
       </p:sp>
-      <p:sp>
-        <p:nvSpPr>
-          <p:cNvPr id="16" name="Rounded Rectangle 15"/>
-          <p:cNvSpPr/>
-          <p:nvPr/>
-        </p:nvSpPr>
-        <p:spPr>
-          <a:xfrm>
-            <a:off x="9028176" y="2331720"/>
-            <a:ext cx="1146047" cy="1371599"/>
-          </a:xfrm>
-          <a:prstGeom prst="roundRect">
-            <a:avLst>
-              <a:gd name="adj" fmla="val 8000"/>
-            </a:avLst>
-          </a:prstGeom>
-          <a:solidFill>
-            <a:srgbClr val="EEF2F7"/>
-          </a:solidFill>
-          <a:ln>
-            <a:solidFill>
-              <a:srgbClr val="D9E2EC"/>
-            </a:solidFill>
-          </a:ln>
-        </p:spPr>
-        <p:style>
-          <a:lnRef idx="1">
-            <a:schemeClr val="accent1"/>
-          </a:lnRef>
-          <a:fillRef idx="3">
-            <a:schemeClr val="accent1"/>
-          </a:fillRef>
-          <a:effectRef idx="2">
-            <a:schemeClr val="accent1"/>
-          </a:effectRef>
-          <a:fontRef idx="minor">
-            <a:schemeClr val="lt1"/>
-          </a:fontRef>
-        </p:style>
-        <p:txBody>
-          <a:bodyPr rtlCol="0" anchor="ctr"/>
-          <a:lstStyle/>
-          <a:p>
-            <a:pPr algn="ctr"/>
-          </a:p>
-        </p:txBody>
-      </p:sp>
+      <p:pic>
+        <p:nvPicPr>
+          <p:cNvPr id="16" name="Picture 15" descr="brewing_chamber.jpg"/>
+          <p:cNvPicPr>
+            <a:picLocks noChangeAspect="1"/>
+          </p:cNvPicPr>
+          <p:nvPr/>
+        </p:nvPicPr>
+        <p:blipFill>
+          <a:blip r:embed="rId3"/>
+          <a:stretch>
+            <a:fillRect/>
+          </a:stretch>
+        </p:blipFill>
+        <p:spPr>
+          <a:xfrm>
+            <a:off x="9028176" y="2635504"/>
+            <a:ext cx="1146047" cy="764032"/>
+          </a:xfrm>
+          <a:prstGeom prst="rect">
+            <a:avLst/>
+          </a:prstGeom>
+        </p:spPr>
+      </p:pic>
       <p:sp>
         <p:nvSpPr>
           <p:cNvPr id="17" name="TextBox 16"/>
@@ -11636,53 +11320,30 @@
           </a:p>
         </p:txBody>
       </p:sp>
-      <p:sp>
-        <p:nvSpPr>
-          <p:cNvPr id="18" name="Rounded Rectangle 17"/>
-          <p:cNvSpPr/>
-          <p:nvPr/>
-        </p:nvSpPr>
-        <p:spPr>
-          <a:xfrm>
-            <a:off x="10283952" y="2331720"/>
-            <a:ext cx="1146047" cy="1371599"/>
-          </a:xfrm>
-          <a:prstGeom prst="roundRect">
-            <a:avLst>
-              <a:gd name="adj" fmla="val 8000"/>
-            </a:avLst>
-          </a:prstGeom>
-          <a:solidFill>
-            <a:srgbClr val="EEF2F7"/>
-          </a:solidFill>
-          <a:ln>
-            <a:solidFill>
-              <a:srgbClr val="D9E2EC"/>
-            </a:solidFill>
-          </a:ln>
-        </p:spPr>
-        <p:style>
-          <a:lnRef idx="1">
-            <a:schemeClr val="accent1"/>
-          </a:lnRef>
-          <a:fillRef idx="3">
-            <a:schemeClr val="accent1"/>
-          </a:fillRef>
-          <a:effectRef idx="2">
-            <a:schemeClr val="accent1"/>
-          </a:effectRef>
-          <a:fontRef idx="minor">
-            <a:schemeClr val="lt1"/>
-          </a:fontRef>
-        </p:style>
-        <p:txBody>
-          <a:bodyPr rtlCol="0" anchor="ctr"/>
-          <a:lstStyle/>
-          <a:p>
-            <a:pPr algn="ctr"/>
-          </a:p>
-        </p:txBody>
-      </p:sp>
+      <p:pic>
+        <p:nvPicPr>
+          <p:cNvPr id="18" name="Picture 17" descr="top_lever.jpg"/>
+          <p:cNvPicPr>
+            <a:picLocks noChangeAspect="1"/>
+          </p:cNvPicPr>
+          <p:nvPr/>
+        </p:nvPicPr>
+        <p:blipFill>
+          <a:blip r:embed="rId4"/>
+          <a:stretch>
+            <a:fillRect/>
+          </a:stretch>
+        </p:blipFill>
+        <p:spPr>
+          <a:xfrm>
+            <a:off x="10283952" y="2635504"/>
+            <a:ext cx="1146047" cy="764032"/>
+          </a:xfrm>
+          <a:prstGeom prst="rect">
+            <a:avLst/>
+          </a:prstGeom>
+        </p:spPr>
+      </p:pic>
       <p:sp>
         <p:nvSpPr>
           <p:cNvPr id="19" name="TextBox 18"/>
@@ -12569,53 +12230,30 @@
           </a:p>
         </p:txBody>
       </p:sp>
-      <p:sp>
-        <p:nvSpPr>
-          <p:cNvPr id="14" name="Rounded Rectangle 13"/>
-          <p:cNvSpPr/>
-          <p:nvPr/>
-        </p:nvSpPr>
-        <p:spPr>
-          <a:xfrm>
-            <a:off x="7772400" y="2331720"/>
-            <a:ext cx="1146047" cy="1371599"/>
-          </a:xfrm>
-          <a:prstGeom prst="roundRect">
-            <a:avLst>
-              <a:gd name="adj" fmla="val 8000"/>
-            </a:avLst>
-          </a:prstGeom>
-          <a:solidFill>
-            <a:srgbClr val="EEF2F7"/>
-          </a:solidFill>
-          <a:ln>
-            <a:solidFill>
-              <a:srgbClr val="D9E2EC"/>
-            </a:solidFill>
-          </a:ln>
-        </p:spPr>
-        <p:style>
-          <a:lnRef idx="1">
-            <a:schemeClr val="accent1"/>
-          </a:lnRef>
-          <a:fillRef idx="3">
-            <a:schemeClr val="accent1"/>
-          </a:fillRef>
-          <a:effectRef idx="2">
-            <a:schemeClr val="accent1"/>
-          </a:effectRef>
-          <a:fontRef idx="minor">
-            <a:schemeClr val="lt1"/>
-          </a:fontRef>
-        </p:style>
-        <p:txBody>
-          <a:bodyPr rtlCol="0" anchor="ctr"/>
-          <a:lstStyle/>
-          <a:p>
-            <a:pPr algn="ctr"/>
-          </a:p>
-        </p:txBody>
-      </p:sp>
+      <p:pic>
+        <p:nvPicPr>
+          <p:cNvPr id="14" name="Picture 13" descr="action_disconnect_wiring.jpg"/>
+          <p:cNvPicPr>
+            <a:picLocks noChangeAspect="1"/>
+          </p:cNvPicPr>
+          <p:nvPr/>
+        </p:nvPicPr>
+        <p:blipFill>
+          <a:blip r:embed="rId2"/>
+          <a:stretch>
+            <a:fillRect/>
+          </a:stretch>
+        </p:blipFill>
+        <p:spPr>
+          <a:xfrm>
+            <a:off x="7772400" y="2635504"/>
+            <a:ext cx="1146047" cy="764032"/>
+          </a:xfrm>
+          <a:prstGeom prst="rect">
+            <a:avLst/>
+          </a:prstGeom>
+        </p:spPr>
+      </p:pic>
       <p:sp>
         <p:nvSpPr>
           <p:cNvPr id="15" name="TextBox 14"/>
@@ -12655,53 +12293,30 @@
           </a:p>
         </p:txBody>
       </p:sp>
-      <p:sp>
-        <p:nvSpPr>
-          <p:cNvPr id="16" name="Rounded Rectangle 15"/>
-          <p:cNvSpPr/>
-          <p:nvPr/>
-        </p:nvSpPr>
-        <p:spPr>
-          <a:xfrm>
-            <a:off x="9028176" y="2331720"/>
-            <a:ext cx="1146047" cy="1371599"/>
-          </a:xfrm>
-          <a:prstGeom prst="roundRect">
-            <a:avLst>
-              <a:gd name="adj" fmla="val 8000"/>
-            </a:avLst>
-          </a:prstGeom>
-          <a:solidFill>
-            <a:srgbClr val="EEF2F7"/>
-          </a:solidFill>
-          <a:ln>
-            <a:solidFill>
-              <a:srgbClr val="D9E2EC"/>
-            </a:solidFill>
-          </a:ln>
-        </p:spPr>
-        <p:style>
-          <a:lnRef idx="1">
-            <a:schemeClr val="accent1"/>
-          </a:lnRef>
-          <a:fillRef idx="3">
-            <a:schemeClr val="accent1"/>
-          </a:fillRef>
-          <a:effectRef idx="2">
-            <a:schemeClr val="accent1"/>
-          </a:effectRef>
-          <a:fontRef idx="minor">
-            <a:schemeClr val="lt1"/>
-          </a:fontRef>
-        </p:style>
-        <p:txBody>
-          <a:bodyPr rtlCol="0" anchor="ctr"/>
-          <a:lstStyle/>
-          <a:p>
-            <a:pPr algn="ctr"/>
-          </a:p>
-        </p:txBody>
-      </p:sp>
+      <p:pic>
+        <p:nvPicPr>
+          <p:cNvPr id="16" name="Picture 15" descr="wiring_harness.jpg"/>
+          <p:cNvPicPr>
+            <a:picLocks noChangeAspect="1"/>
+          </p:cNvPicPr>
+          <p:nvPr/>
+        </p:nvPicPr>
+        <p:blipFill>
+          <a:blip r:embed="rId3"/>
+          <a:stretch>
+            <a:fillRect/>
+          </a:stretch>
+        </p:blipFill>
+        <p:spPr>
+          <a:xfrm>
+            <a:off x="9028176" y="2635504"/>
+            <a:ext cx="1146047" cy="764032"/>
+          </a:xfrm>
+          <a:prstGeom prst="rect">
+            <a:avLst/>
+          </a:prstGeom>
+        </p:spPr>
+      </p:pic>
       <p:sp>
         <p:nvSpPr>
           <p:cNvPr id="17" name="TextBox 16"/>
@@ -12741,53 +12356,30 @@
           </a:p>
         </p:txBody>
       </p:sp>
-      <p:sp>
-        <p:nvSpPr>
-          <p:cNvPr id="18" name="Rounded Rectangle 17"/>
-          <p:cNvSpPr/>
-          <p:nvPr/>
-        </p:nvSpPr>
-        <p:spPr>
-          <a:xfrm>
-            <a:off x="10283952" y="2331720"/>
-            <a:ext cx="1146047" cy="1371599"/>
-          </a:xfrm>
-          <a:prstGeom prst="roundRect">
-            <a:avLst>
-              <a:gd name="adj" fmla="val 8000"/>
-            </a:avLst>
-          </a:prstGeom>
-          <a:solidFill>
-            <a:srgbClr val="EEF2F7"/>
-          </a:solidFill>
-          <a:ln>
-            <a:solidFill>
-              <a:srgbClr val="D9E2EC"/>
-            </a:solidFill>
-          </a:ln>
-        </p:spPr>
-        <p:style>
-          <a:lnRef idx="1">
-            <a:schemeClr val="accent1"/>
-          </a:lnRef>
-          <a:fillRef idx="3">
-            <a:schemeClr val="accent1"/>
-          </a:fillRef>
-          <a:effectRef idx="2">
-            <a:schemeClr val="accent1"/>
-          </a:effectRef>
-          <a:fontRef idx="minor">
-            <a:schemeClr val="lt1"/>
-          </a:fontRef>
-        </p:style>
-        <p:txBody>
-          <a:bodyPr rtlCol="0" anchor="ctr"/>
-          <a:lstStyle/>
-          <a:p>
-            <a:pPr algn="ctr"/>
-          </a:p>
-        </p:txBody>
-      </p:sp>
+      <p:pic>
+        <p:nvPicPr>
+          <p:cNvPr id="18" name="Picture 17" descr="silicone_tubing.jpg"/>
+          <p:cNvPicPr>
+            <a:picLocks noChangeAspect="1"/>
+          </p:cNvPicPr>
+          <p:nvPr/>
+        </p:nvPicPr>
+        <p:blipFill>
+          <a:blip r:embed="rId4"/>
+          <a:stretch>
+            <a:fillRect/>
+          </a:stretch>
+        </p:blipFill>
+        <p:spPr>
+          <a:xfrm>
+            <a:off x="10283952" y="2635504"/>
+            <a:ext cx="1146047" cy="764032"/>
+          </a:xfrm>
+          <a:prstGeom prst="rect">
+            <a:avLst/>
+          </a:prstGeom>
+        </p:spPr>
+      </p:pic>
       <p:sp>
         <p:nvSpPr>
           <p:cNvPr id="19" name="TextBox 18"/>
@@ -13674,53 +13266,30 @@
           </a:p>
         </p:txBody>
       </p:sp>
-      <p:sp>
-        <p:nvSpPr>
-          <p:cNvPr id="14" name="Rounded Rectangle 13"/>
-          <p:cNvSpPr/>
-          <p:nvPr/>
-        </p:nvSpPr>
-        <p:spPr>
-          <a:xfrm>
-            <a:off x="7772400" y="2331720"/>
-            <a:ext cx="1146047" cy="1371599"/>
-          </a:xfrm>
-          <a:prstGeom prst="roundRect">
-            <a:avLst>
-              <a:gd name="adj" fmla="val 8000"/>
-            </a:avLst>
-          </a:prstGeom>
-          <a:solidFill>
-            <a:srgbClr val="EEF2F7"/>
-          </a:solidFill>
-          <a:ln>
-            <a:solidFill>
-              <a:srgbClr val="D9E2EC"/>
-            </a:solidFill>
-          </a:ln>
-        </p:spPr>
-        <p:style>
-          <a:lnRef idx="1">
-            <a:schemeClr val="accent1"/>
-          </a:lnRef>
-          <a:fillRef idx="3">
-            <a:schemeClr val="accent1"/>
-          </a:fillRef>
-          <a:effectRef idx="2">
-            <a:schemeClr val="accent1"/>
-          </a:effectRef>
-          <a:fontRef idx="minor">
-            <a:schemeClr val="lt1"/>
-          </a:fontRef>
-        </p:style>
-        <p:txBody>
-          <a:bodyPr rtlCol="0" anchor="ctr"/>
-          <a:lstStyle/>
-          <a:p>
-            <a:pPr algn="ctr"/>
-          </a:p>
-        </p:txBody>
-      </p:sp>
+      <p:pic>
+        <p:nvPicPr>
+          <p:cNvPr id="14" name="Picture 13" descr="action_remove_pcb.jpg"/>
+          <p:cNvPicPr>
+            <a:picLocks noChangeAspect="1"/>
+          </p:cNvPicPr>
+          <p:nvPr/>
+        </p:nvPicPr>
+        <p:blipFill>
+          <a:blip r:embed="rId2"/>
+          <a:stretch>
+            <a:fillRect/>
+          </a:stretch>
+        </p:blipFill>
+        <p:spPr>
+          <a:xfrm>
+            <a:off x="7772400" y="2635504"/>
+            <a:ext cx="1146047" cy="764032"/>
+          </a:xfrm>
+          <a:prstGeom prst="rect">
+            <a:avLst/>
+          </a:prstGeom>
+        </p:spPr>
+      </p:pic>
       <p:sp>
         <p:nvSpPr>
           <p:cNvPr id="15" name="TextBox 14"/>
@@ -13760,53 +13329,30 @@
           </a:p>
         </p:txBody>
       </p:sp>
-      <p:sp>
-        <p:nvSpPr>
-          <p:cNvPr id="16" name="Rounded Rectangle 15"/>
-          <p:cNvSpPr/>
-          <p:nvPr/>
-        </p:nvSpPr>
-        <p:spPr>
-          <a:xfrm>
-            <a:off x="9028176" y="2331720"/>
-            <a:ext cx="1146047" cy="1371599"/>
-          </a:xfrm>
-          <a:prstGeom prst="roundRect">
-            <a:avLst>
-              <a:gd name="adj" fmla="val 8000"/>
-            </a:avLst>
-          </a:prstGeom>
-          <a:solidFill>
-            <a:srgbClr val="EEF2F7"/>
-          </a:solidFill>
-          <a:ln>
-            <a:solidFill>
-              <a:srgbClr val="D9E2EC"/>
-            </a:solidFill>
-          </a:ln>
-        </p:spPr>
-        <p:style>
-          <a:lnRef idx="1">
-            <a:schemeClr val="accent1"/>
-          </a:lnRef>
-          <a:fillRef idx="3">
-            <a:schemeClr val="accent1"/>
-          </a:fillRef>
-          <a:effectRef idx="2">
-            <a:schemeClr val="accent1"/>
-          </a:effectRef>
-          <a:fontRef idx="minor">
-            <a:schemeClr val="lt1"/>
-          </a:fontRef>
-        </p:style>
-        <p:txBody>
-          <a:bodyPr rtlCol="0" anchor="ctr"/>
-          <a:lstStyle/>
-          <a:p>
-            <a:pPr algn="ctr"/>
-          </a:p>
-        </p:txBody>
-      </p:sp>
+      <p:pic>
+        <p:nvPicPr>
+          <p:cNvPr id="16" name="Picture 15" descr="motherboard.jpg"/>
+          <p:cNvPicPr>
+            <a:picLocks noChangeAspect="1"/>
+          </p:cNvPicPr>
+          <p:nvPr/>
+        </p:nvPicPr>
+        <p:blipFill>
+          <a:blip r:embed="rId3"/>
+          <a:stretch>
+            <a:fillRect/>
+          </a:stretch>
+        </p:blipFill>
+        <p:spPr>
+          <a:xfrm>
+            <a:off x="9028176" y="2635504"/>
+            <a:ext cx="1146047" cy="764032"/>
+          </a:xfrm>
+          <a:prstGeom prst="rect">
+            <a:avLst/>
+          </a:prstGeom>
+        </p:spPr>
+      </p:pic>
       <p:sp>
         <p:nvSpPr>
           <p:cNvPr id="17" name="TextBox 16"/>
@@ -13846,53 +13392,30 @@
           </a:p>
         </p:txBody>
       </p:sp>
-      <p:sp>
-        <p:nvSpPr>
-          <p:cNvPr id="18" name="Rounded Rectangle 17"/>
-          <p:cNvSpPr/>
-          <p:nvPr/>
-        </p:nvSpPr>
-        <p:spPr>
-          <a:xfrm>
-            <a:off x="10283952" y="2331720"/>
-            <a:ext cx="1146047" cy="1371599"/>
-          </a:xfrm>
-          <a:prstGeom prst="roundRect">
-            <a:avLst>
-              <a:gd name="adj" fmla="val 8000"/>
-            </a:avLst>
-          </a:prstGeom>
-          <a:solidFill>
-            <a:srgbClr val="EEF2F7"/>
-          </a:solidFill>
-          <a:ln>
-            <a:solidFill>
-              <a:srgbClr val="D9E2EC"/>
-            </a:solidFill>
-          </a:ln>
-        </p:spPr>
-        <p:style>
-          <a:lnRef idx="1">
-            <a:schemeClr val="accent1"/>
-          </a:lnRef>
-          <a:fillRef idx="3">
-            <a:schemeClr val="accent1"/>
-          </a:fillRef>
-          <a:effectRef idx="2">
-            <a:schemeClr val="accent1"/>
-          </a:effectRef>
-          <a:fontRef idx="minor">
-            <a:schemeClr val="lt1"/>
-          </a:fontRef>
-        </p:style>
-        <p:txBody>
-          <a:bodyPr rtlCol="0" anchor="ctr"/>
-          <a:lstStyle/>
-          <a:p>
-            <a:pPr algn="ctr"/>
-          </a:p>
-        </p:txBody>
-      </p:sp>
+      <p:pic>
+        <p:nvPicPr>
+          <p:cNvPr id="18" name="Picture 17" descr="action_remove_pcb.jpg"/>
+          <p:cNvPicPr>
+            <a:picLocks noChangeAspect="1"/>
+          </p:cNvPicPr>
+          <p:nvPr/>
+        </p:nvPicPr>
+        <p:blipFill>
+          <a:blip r:embed="rId2"/>
+          <a:stretch>
+            <a:fillRect/>
+          </a:stretch>
+        </p:blipFill>
+        <p:spPr>
+          <a:xfrm>
+            <a:off x="10283952" y="2635504"/>
+            <a:ext cx="1146047" cy="764032"/>
+          </a:xfrm>
+          <a:prstGeom prst="rect">
+            <a:avLst/>
+          </a:prstGeom>
+        </p:spPr>
+      </p:pic>
       <p:sp>
         <p:nvSpPr>
           <p:cNvPr id="19" name="TextBox 18"/>
@@ -14778,53 +14301,30 @@
           </a:p>
         </p:txBody>
       </p:sp>
-      <p:sp>
-        <p:nvSpPr>
-          <p:cNvPr id="14" name="Rounded Rectangle 13"/>
-          <p:cNvSpPr/>
-          <p:nvPr/>
-        </p:nvSpPr>
-        <p:spPr>
-          <a:xfrm>
-            <a:off x="7772400" y="2331720"/>
-            <a:ext cx="1146047" cy="1371599"/>
-          </a:xfrm>
-          <a:prstGeom prst="roundRect">
-            <a:avLst>
-              <a:gd name="adj" fmla="val 8000"/>
-            </a:avLst>
-          </a:prstGeom>
-          <a:solidFill>
-            <a:srgbClr val="EEF2F7"/>
-          </a:solidFill>
-          <a:ln>
-            <a:solidFill>
-              <a:srgbClr val="D9E2EC"/>
-            </a:solidFill>
-          </a:ln>
-        </p:spPr>
-        <p:style>
-          <a:lnRef idx="1">
-            <a:schemeClr val="accent1"/>
-          </a:lnRef>
-          <a:fillRef idx="3">
-            <a:schemeClr val="accent1"/>
-          </a:fillRef>
-          <a:effectRef idx="2">
-            <a:schemeClr val="accent1"/>
-          </a:effectRef>
-          <a:fontRef idx="minor">
-            <a:schemeClr val="lt1"/>
-          </a:fontRef>
-        </p:style>
-        <p:txBody>
-          <a:bodyPr rtlCol="0" anchor="ctr"/>
-          <a:lstStyle/>
-          <a:p>
-            <a:pPr algn="ctr"/>
-          </a:p>
-        </p:txBody>
-      </p:sp>
+      <p:pic>
+        <p:nvPicPr>
+          <p:cNvPr id="14" name="Picture 13" descr="action_remove_pump.jpg"/>
+          <p:cNvPicPr>
+            <a:picLocks noChangeAspect="1"/>
+          </p:cNvPicPr>
+          <p:nvPr/>
+        </p:nvPicPr>
+        <p:blipFill>
+          <a:blip r:embed="rId2"/>
+          <a:stretch>
+            <a:fillRect/>
+          </a:stretch>
+        </p:blipFill>
+        <p:spPr>
+          <a:xfrm>
+            <a:off x="7772400" y="2635504"/>
+            <a:ext cx="1146047" cy="764032"/>
+          </a:xfrm>
+          <a:prstGeom prst="rect">
+            <a:avLst/>
+          </a:prstGeom>
+        </p:spPr>
+      </p:pic>
       <p:sp>
         <p:nvSpPr>
           <p:cNvPr id="15" name="TextBox 14"/>
@@ -14864,53 +14364,30 @@
           </a:p>
         </p:txBody>
       </p:sp>
-      <p:sp>
-        <p:nvSpPr>
-          <p:cNvPr id="16" name="Rounded Rectangle 15"/>
-          <p:cNvSpPr/>
-          <p:nvPr/>
-        </p:nvSpPr>
-        <p:spPr>
-          <a:xfrm>
-            <a:off x="9028176" y="2331720"/>
-            <a:ext cx="1146047" cy="1371599"/>
-          </a:xfrm>
-          <a:prstGeom prst="roundRect">
-            <a:avLst>
-              <a:gd name="adj" fmla="val 8000"/>
-            </a:avLst>
-          </a:prstGeom>
-          <a:solidFill>
-            <a:srgbClr val="EEF2F7"/>
-          </a:solidFill>
-          <a:ln>
-            <a:solidFill>
-              <a:srgbClr val="D9E2EC"/>
-            </a:solidFill>
-          </a:ln>
-        </p:spPr>
-        <p:style>
-          <a:lnRef idx="1">
-            <a:schemeClr val="accent1"/>
-          </a:lnRef>
-          <a:fillRef idx="3">
-            <a:schemeClr val="accent1"/>
-          </a:fillRef>
-          <a:effectRef idx="2">
-            <a:schemeClr val="accent1"/>
-          </a:effectRef>
-          <a:fontRef idx="minor">
-            <a:schemeClr val="lt1"/>
-          </a:fontRef>
-        </p:style>
-        <p:txBody>
-          <a:bodyPr rtlCol="0" anchor="ctr"/>
-          <a:lstStyle/>
-          <a:p>
-            <a:pPr algn="ctr"/>
-          </a:p>
-        </p:txBody>
-      </p:sp>
+      <p:pic>
+        <p:nvPicPr>
+          <p:cNvPr id="16" name="Picture 15" descr="water_pump.jpg"/>
+          <p:cNvPicPr>
+            <a:picLocks noChangeAspect="1"/>
+          </p:cNvPicPr>
+          <p:nvPr/>
+        </p:nvPicPr>
+        <p:blipFill>
+          <a:blip r:embed="rId3"/>
+          <a:stretch>
+            <a:fillRect/>
+          </a:stretch>
+        </p:blipFill>
+        <p:spPr>
+          <a:xfrm>
+            <a:off x="9028176" y="2635504"/>
+            <a:ext cx="1146047" cy="764032"/>
+          </a:xfrm>
+          <a:prstGeom prst="rect">
+            <a:avLst/>
+          </a:prstGeom>
+        </p:spPr>
+      </p:pic>
       <p:sp>
         <p:nvSpPr>
           <p:cNvPr id="17" name="TextBox 16"/>
@@ -14950,53 +14427,30 @@
           </a:p>
         </p:txBody>
       </p:sp>
-      <p:sp>
-        <p:nvSpPr>
-          <p:cNvPr id="18" name="Rounded Rectangle 17"/>
-          <p:cNvSpPr/>
-          <p:nvPr/>
-        </p:nvSpPr>
-        <p:spPr>
-          <a:xfrm>
-            <a:off x="10283952" y="2331720"/>
-            <a:ext cx="1146047" cy="1371599"/>
-          </a:xfrm>
-          <a:prstGeom prst="roundRect">
-            <a:avLst>
-              <a:gd name="adj" fmla="val 8000"/>
-            </a:avLst>
-          </a:prstGeom>
-          <a:solidFill>
-            <a:srgbClr val="EEF2F7"/>
-          </a:solidFill>
-          <a:ln>
-            <a:solidFill>
-              <a:srgbClr val="D9E2EC"/>
-            </a:solidFill>
-          </a:ln>
-        </p:spPr>
-        <p:style>
-          <a:lnRef idx="1">
-            <a:schemeClr val="accent1"/>
-          </a:lnRef>
-          <a:fillRef idx="3">
-            <a:schemeClr val="accent1"/>
-          </a:fillRef>
-          <a:effectRef idx="2">
-            <a:schemeClr val="accent1"/>
-          </a:effectRef>
-          <a:fontRef idx="minor">
-            <a:schemeClr val="lt1"/>
-          </a:fontRef>
-        </p:style>
-        <p:txBody>
-          <a:bodyPr rtlCol="0" anchor="ctr"/>
-          <a:lstStyle/>
-          <a:p>
-            <a:pPr algn="ctr"/>
-          </a:p>
-        </p:txBody>
-      </p:sp>
+      <p:pic>
+        <p:nvPicPr>
+          <p:cNvPr id="18" name="Picture 17" descr="action_remove_pump.jpg"/>
+          <p:cNvPicPr>
+            <a:picLocks noChangeAspect="1"/>
+          </p:cNvPicPr>
+          <p:nvPr/>
+        </p:nvPicPr>
+        <p:blipFill>
+          <a:blip r:embed="rId2"/>
+          <a:stretch>
+            <a:fillRect/>
+          </a:stretch>
+        </p:blipFill>
+        <p:spPr>
+          <a:xfrm>
+            <a:off x="10283952" y="2635504"/>
+            <a:ext cx="1146047" cy="764032"/>
+          </a:xfrm>
+          <a:prstGeom prst="rect">
+            <a:avLst/>
+          </a:prstGeom>
+        </p:spPr>
+      </p:pic>
       <p:sp>
         <p:nvSpPr>
           <p:cNvPr id="19" name="TextBox 18"/>
@@ -15882,53 +15336,30 @@
           </a:p>
         </p:txBody>
       </p:sp>
-      <p:sp>
-        <p:nvSpPr>
-          <p:cNvPr id="14" name="Rounded Rectangle 13"/>
-          <p:cNvSpPr/>
-          <p:nvPr/>
-        </p:nvSpPr>
-        <p:spPr>
-          <a:xfrm>
-            <a:off x="7772400" y="2331720"/>
-            <a:ext cx="1146047" cy="1371599"/>
-          </a:xfrm>
-          <a:prstGeom prst="roundRect">
-            <a:avLst>
-              <a:gd name="adj" fmla="val 8000"/>
-            </a:avLst>
-          </a:prstGeom>
-          <a:solidFill>
-            <a:srgbClr val="EEF2F7"/>
-          </a:solidFill>
-          <a:ln>
-            <a:solidFill>
-              <a:srgbClr val="D9E2EC"/>
-            </a:solidFill>
-          </a:ln>
-        </p:spPr>
-        <p:style>
-          <a:lnRef idx="1">
-            <a:schemeClr val="accent1"/>
-          </a:lnRef>
-          <a:fillRef idx="3">
-            <a:schemeClr val="accent1"/>
-          </a:fillRef>
-          <a:effectRef idx="2">
-            <a:schemeClr val="accent1"/>
-          </a:effectRef>
-          <a:fontRef idx="minor">
-            <a:schemeClr val="lt1"/>
-          </a:fontRef>
-        </p:style>
-        <p:txBody>
-          <a:bodyPr rtlCol="0" anchor="ctr"/>
-          <a:lstStyle/>
-          <a:p>
-            <a:pPr algn="ctr"/>
-          </a:p>
-        </p:txBody>
-      </p:sp>
+      <p:pic>
+        <p:nvPicPr>
+          <p:cNvPr id="14" name="Picture 13" descr="action_remove_thermoblock.jpg"/>
+          <p:cNvPicPr>
+            <a:picLocks noChangeAspect="1"/>
+          </p:cNvPicPr>
+          <p:nvPr/>
+        </p:nvPicPr>
+        <p:blipFill>
+          <a:blip r:embed="rId2"/>
+          <a:stretch>
+            <a:fillRect/>
+          </a:stretch>
+        </p:blipFill>
+        <p:spPr>
+          <a:xfrm>
+            <a:off x="7772400" y="2635504"/>
+            <a:ext cx="1146047" cy="764032"/>
+          </a:xfrm>
+          <a:prstGeom prst="rect">
+            <a:avLst/>
+          </a:prstGeom>
+        </p:spPr>
+      </p:pic>
       <p:sp>
         <p:nvSpPr>
           <p:cNvPr id="15" name="TextBox 14"/>
@@ -15968,53 +15399,30 @@
           </a:p>
         </p:txBody>
       </p:sp>
-      <p:sp>
-        <p:nvSpPr>
-          <p:cNvPr id="16" name="Rounded Rectangle 15"/>
-          <p:cNvSpPr/>
-          <p:nvPr/>
-        </p:nvSpPr>
-        <p:spPr>
-          <a:xfrm>
-            <a:off x="9028176" y="2331720"/>
-            <a:ext cx="1146047" cy="1371599"/>
-          </a:xfrm>
-          <a:prstGeom prst="roundRect">
-            <a:avLst>
-              <a:gd name="adj" fmla="val 8000"/>
-            </a:avLst>
-          </a:prstGeom>
-          <a:solidFill>
-            <a:srgbClr val="EEF2F7"/>
-          </a:solidFill>
-          <a:ln>
-            <a:solidFill>
-              <a:srgbClr val="D9E2EC"/>
-            </a:solidFill>
-          </a:ln>
-        </p:spPr>
-        <p:style>
-          <a:lnRef idx="1">
-            <a:schemeClr val="accent1"/>
-          </a:lnRef>
-          <a:fillRef idx="3">
-            <a:schemeClr val="accent1"/>
-          </a:fillRef>
-          <a:effectRef idx="2">
-            <a:schemeClr val="accent1"/>
-          </a:effectRef>
-          <a:fontRef idx="minor">
-            <a:schemeClr val="lt1"/>
-          </a:fontRef>
-        </p:style>
-        <p:txBody>
-          <a:bodyPr rtlCol="0" anchor="ctr"/>
-          <a:lstStyle/>
-          <a:p>
-            <a:pPr algn="ctr"/>
-          </a:p>
-        </p:txBody>
-      </p:sp>
+      <p:pic>
+        <p:nvPicPr>
+          <p:cNvPr id="16" name="Picture 15" descr="thermoblock.jpg"/>
+          <p:cNvPicPr>
+            <a:picLocks noChangeAspect="1"/>
+          </p:cNvPicPr>
+          <p:nvPr/>
+        </p:nvPicPr>
+        <p:blipFill>
+          <a:blip r:embed="rId3"/>
+          <a:stretch>
+            <a:fillRect/>
+          </a:stretch>
+        </p:blipFill>
+        <p:spPr>
+          <a:xfrm>
+            <a:off x="9028176" y="2635504"/>
+            <a:ext cx="1146047" cy="764032"/>
+          </a:xfrm>
+          <a:prstGeom prst="rect">
+            <a:avLst/>
+          </a:prstGeom>
+        </p:spPr>
+      </p:pic>
       <p:sp>
         <p:nvSpPr>
           <p:cNvPr id="17" name="TextBox 16"/>
@@ -16054,53 +15462,30 @@
           </a:p>
         </p:txBody>
       </p:sp>
-      <p:sp>
-        <p:nvSpPr>
-          <p:cNvPr id="18" name="Rounded Rectangle 17"/>
-          <p:cNvSpPr/>
-          <p:nvPr/>
-        </p:nvSpPr>
-        <p:spPr>
-          <a:xfrm>
-            <a:off x="10283952" y="2331720"/>
-            <a:ext cx="1146047" cy="1371599"/>
-          </a:xfrm>
-          <a:prstGeom prst="roundRect">
-            <a:avLst>
-              <a:gd name="adj" fmla="val 8000"/>
-            </a:avLst>
-          </a:prstGeom>
-          <a:solidFill>
-            <a:srgbClr val="EEF2F7"/>
-          </a:solidFill>
-          <a:ln>
-            <a:solidFill>
-              <a:srgbClr val="D9E2EC"/>
-            </a:solidFill>
-          </a:ln>
-        </p:spPr>
-        <p:style>
-          <a:lnRef idx="1">
-            <a:schemeClr val="accent1"/>
-          </a:lnRef>
-          <a:fillRef idx="3">
-            <a:schemeClr val="accent1"/>
-          </a:fillRef>
-          <a:effectRef idx="2">
-            <a:schemeClr val="accent1"/>
-          </a:effectRef>
-          <a:fontRef idx="minor">
-            <a:schemeClr val="lt1"/>
-          </a:fontRef>
-        </p:style>
-        <p:txBody>
-          <a:bodyPr rtlCol="0" anchor="ctr"/>
-          <a:lstStyle/>
-          <a:p>
-            <a:pPr algn="ctr"/>
-          </a:p>
-        </p:txBody>
-      </p:sp>
+      <p:pic>
+        <p:nvPicPr>
+          <p:cNvPr id="18" name="Picture 17" descr="action_remove_thermoblock.jpg"/>
+          <p:cNvPicPr>
+            <a:picLocks noChangeAspect="1"/>
+          </p:cNvPicPr>
+          <p:nvPr/>
+        </p:nvPicPr>
+        <p:blipFill>
+          <a:blip r:embed="rId2"/>
+          <a:stretch>
+            <a:fillRect/>
+          </a:stretch>
+        </p:blipFill>
+        <p:spPr>
+          <a:xfrm>
+            <a:off x="10283952" y="2635504"/>
+            <a:ext cx="1146047" cy="764032"/>
+          </a:xfrm>
+          <a:prstGeom prst="rect">
+            <a:avLst/>
+          </a:prstGeom>
+        </p:spPr>
+      </p:pic>
       <p:sp>
         <p:nvSpPr>
           <p:cNvPr id="19" name="TextBox 18"/>
@@ -17926,53 +17311,30 @@
           </a:p>
         </p:txBody>
       </p:sp>
-      <p:sp>
-        <p:nvSpPr>
-          <p:cNvPr id="14" name="Rounded Rectangle 13"/>
-          <p:cNvSpPr/>
-          <p:nvPr/>
-        </p:nvSpPr>
-        <p:spPr>
-          <a:xfrm>
-            <a:off x="7772400" y="2331720"/>
-            <a:ext cx="1146047" cy="1371599"/>
-          </a:xfrm>
-          <a:prstGeom prst="roundRect">
-            <a:avLst>
-              <a:gd name="adj" fmla="val 8000"/>
-            </a:avLst>
-          </a:prstGeom>
-          <a:solidFill>
-            <a:srgbClr val="EEF2F7"/>
-          </a:solidFill>
-          <a:ln>
-            <a:solidFill>
-              <a:srgbClr val="D9E2EC"/>
-            </a:solidFill>
-          </a:ln>
-        </p:spPr>
-        <p:style>
-          <a:lnRef idx="1">
-            <a:schemeClr val="accent1"/>
-          </a:lnRef>
-          <a:fillRef idx="3">
-            <a:schemeClr val="accent1"/>
-          </a:fillRef>
-          <a:effectRef idx="2">
-            <a:schemeClr val="accent1"/>
-          </a:effectRef>
-          <a:fontRef idx="minor">
-            <a:schemeClr val="lt1"/>
-          </a:fontRef>
-        </p:style>
-        <p:txBody>
-          <a:bodyPr rtlCol="0" anchor="ctr"/>
-          <a:lstStyle/>
-          <a:p>
-            <a:pPr algn="ctr"/>
-          </a:p>
-        </p:txBody>
-      </p:sp>
+      <p:pic>
+        <p:nvPicPr>
+          <p:cNvPr id="14" name="Picture 13" descr="action_separate_remaining.jpg"/>
+          <p:cNvPicPr>
+            <a:picLocks noChangeAspect="1"/>
+          </p:cNvPicPr>
+          <p:nvPr/>
+        </p:nvPicPr>
+        <p:blipFill>
+          <a:blip r:embed="rId2"/>
+          <a:stretch>
+            <a:fillRect/>
+          </a:stretch>
+        </p:blipFill>
+        <p:spPr>
+          <a:xfrm>
+            <a:off x="7772400" y="2635504"/>
+            <a:ext cx="1146047" cy="764032"/>
+          </a:xfrm>
+          <a:prstGeom prst="rect">
+            <a:avLst/>
+          </a:prstGeom>
+        </p:spPr>
+      </p:pic>
       <p:sp>
         <p:nvSpPr>
           <p:cNvPr id="15" name="TextBox 14"/>
@@ -18012,53 +17374,30 @@
           </a:p>
         </p:txBody>
       </p:sp>
-      <p:sp>
-        <p:nvSpPr>
-          <p:cNvPr id="16" name="Rounded Rectangle 15"/>
-          <p:cNvSpPr/>
-          <p:nvPr/>
-        </p:nvSpPr>
-        <p:spPr>
-          <a:xfrm>
-            <a:off x="9028176" y="2331720"/>
-            <a:ext cx="1146047" cy="1371599"/>
-          </a:xfrm>
-          <a:prstGeom prst="roundRect">
-            <a:avLst>
-              <a:gd name="adj" fmla="val 8000"/>
-            </a:avLst>
-          </a:prstGeom>
-          <a:solidFill>
-            <a:srgbClr val="EEF2F7"/>
-          </a:solidFill>
-          <a:ln>
-            <a:solidFill>
-              <a:srgbClr val="D9E2EC"/>
-            </a:solidFill>
-          </a:ln>
-        </p:spPr>
-        <p:style>
-          <a:lnRef idx="1">
-            <a:schemeClr val="accent1"/>
-          </a:lnRef>
-          <a:fillRef idx="3">
-            <a:schemeClr val="accent1"/>
-          </a:fillRef>
-          <a:effectRef idx="2">
-            <a:schemeClr val="accent1"/>
-          </a:effectRef>
-          <a:fontRef idx="minor">
-            <a:schemeClr val="lt1"/>
-          </a:fontRef>
-        </p:style>
-        <p:txBody>
-          <a:bodyPr rtlCol="0" anchor="ctr"/>
-          <a:lstStyle/>
-          <a:p>
-            <a:pPr algn="ctr"/>
-          </a:p>
-        </p:txBody>
-      </p:sp>
+      <p:pic>
+        <p:nvPicPr>
+          <p:cNvPr id="16" name="Picture 15" descr="final_internal_frame.jpg"/>
+          <p:cNvPicPr>
+            <a:picLocks noChangeAspect="1"/>
+          </p:cNvPicPr>
+          <p:nvPr/>
+        </p:nvPicPr>
+        <p:blipFill>
+          <a:blip r:embed="rId3"/>
+          <a:stretch>
+            <a:fillRect/>
+          </a:stretch>
+        </p:blipFill>
+        <p:spPr>
+          <a:xfrm>
+            <a:off x="9028176" y="2635504"/>
+            <a:ext cx="1146047" cy="764032"/>
+          </a:xfrm>
+          <a:prstGeom prst="rect">
+            <a:avLst/>
+          </a:prstGeom>
+        </p:spPr>
+      </p:pic>
       <p:sp>
         <p:nvSpPr>
           <p:cNvPr id="17" name="TextBox 16"/>
@@ -18098,53 +17437,30 @@
           </a:p>
         </p:txBody>
       </p:sp>
-      <p:sp>
-        <p:nvSpPr>
-          <p:cNvPr id="18" name="Rounded Rectangle 17"/>
-          <p:cNvSpPr/>
-          <p:nvPr/>
-        </p:nvSpPr>
-        <p:spPr>
-          <a:xfrm>
-            <a:off x="10283952" y="2331720"/>
-            <a:ext cx="1146047" cy="1371599"/>
-          </a:xfrm>
-          <a:prstGeom prst="roundRect">
-            <a:avLst>
-              <a:gd name="adj" fmla="val 8000"/>
-            </a:avLst>
-          </a:prstGeom>
-          <a:solidFill>
-            <a:srgbClr val="EEF2F7"/>
-          </a:solidFill>
-          <a:ln>
-            <a:solidFill>
-              <a:srgbClr val="D9E2EC"/>
-            </a:solidFill>
-          </a:ln>
-        </p:spPr>
-        <p:style>
-          <a:lnRef idx="1">
-            <a:schemeClr val="accent1"/>
-          </a:lnRef>
-          <a:fillRef idx="3">
-            <a:schemeClr val="accent1"/>
-          </a:fillRef>
-          <a:effectRef idx="2">
-            <a:schemeClr val="accent1"/>
-          </a:effectRef>
-          <a:fontRef idx="minor">
-            <a:schemeClr val="lt1"/>
-          </a:fontRef>
-        </p:style>
-        <p:txBody>
-          <a:bodyPr rtlCol="0" anchor="ctr"/>
-          <a:lstStyle/>
-          <a:p>
-            <a:pPr algn="ctr"/>
-          </a:p>
-        </p:txBody>
-      </p:sp>
+      <p:pic>
+        <p:nvPicPr>
+          <p:cNvPr id="18" name="Picture 17" descr="final_power_cable.jpg"/>
+          <p:cNvPicPr>
+            <a:picLocks noChangeAspect="1"/>
+          </p:cNvPicPr>
+          <p:nvPr/>
+        </p:nvPicPr>
+        <p:blipFill>
+          <a:blip r:embed="rId4"/>
+          <a:stretch>
+            <a:fillRect/>
+          </a:stretch>
+        </p:blipFill>
+        <p:spPr>
+          <a:xfrm>
+            <a:off x="10283952" y="2635504"/>
+            <a:ext cx="1146047" cy="764032"/>
+          </a:xfrm>
+          <a:prstGeom prst="rect">
+            <a:avLst/>
+          </a:prstGeom>
+        </p:spPr>
+      </p:pic>
       <p:sp>
         <p:nvSpPr>
           <p:cNvPr id="19" name="TextBox 18"/>
